--- a/NFC – Near Field Communication.pptx
+++ b/NFC – Near Field Communication.pptx
@@ -8,8 +8,8 @@
     <p:sldId id="256" r:id="rId2"/>
     <p:sldId id="257" r:id="rId3"/>
     <p:sldId id="258" r:id="rId4"/>
-    <p:sldId id="259" r:id="rId5"/>
-    <p:sldId id="260" r:id="rId6"/>
+    <p:sldId id="260" r:id="rId5"/>
+    <p:sldId id="259" r:id="rId6"/>
     <p:sldId id="261" r:id="rId7"/>
   </p:sldIdLst>
   <p:sldSz cx="12192000" cy="6858000"/>
@@ -109,6 +109,11 @@
       </a:defRPr>
     </a:lvl9pPr>
   </p:defaultTextStyle>
+  <p:extLst>
+    <p:ext uri="{EFAFB233-063F-42B5-8137-9DF3F51BA10A}">
+      <p15:sldGuideLst xmlns:p15="http://schemas.microsoft.com/office/powerpoint/2012/main"/>
+    </p:ext>
+  </p:extLst>
 </p:presentation>
 </file>
 
@@ -16066,6 +16071,135 @@
 <file path=ppt/slides/slide4.xml><?xml version="1.0" encoding="utf-8"?>
 <p:sld xmlns:a="http://schemas.openxmlformats.org/drawingml/2006/main" xmlns:r="http://schemas.openxmlformats.org/officeDocument/2006/relationships" xmlns:p="http://schemas.openxmlformats.org/presentationml/2006/main">
   <p:cSld>
+    <p:spTree>
+      <p:nvGrpSpPr>
+        <p:cNvPr id="1" name=""/>
+        <p:cNvGrpSpPr/>
+        <p:nvPr/>
+      </p:nvGrpSpPr>
+      <p:grpSpPr>
+        <a:xfrm>
+          <a:off x="0" y="0"/>
+          <a:ext cx="0" cy="0"/>
+          <a:chOff x="0" y="0"/>
+          <a:chExt cx="0" cy="0"/>
+        </a:xfrm>
+      </p:grpSpPr>
+      <p:sp>
+        <p:nvSpPr>
+          <p:cNvPr id="2" name="Titre 1">
+            <a:extLst>
+              <a:ext uri="{FF2B5EF4-FFF2-40B4-BE49-F238E27FC236}">
+                <a16:creationId xmlns:a16="http://schemas.microsoft.com/office/drawing/2014/main" id="{8554291C-E634-B364-A7A2-8423956DEAFF}"/>
+              </a:ext>
+            </a:extLst>
+          </p:cNvPr>
+          <p:cNvSpPr>
+            <a:spLocks noGrp="1"/>
+          </p:cNvSpPr>
+          <p:nvPr>
+            <p:ph type="title"/>
+          </p:nvPr>
+        </p:nvSpPr>
+        <p:spPr/>
+        <p:txBody>
+          <a:bodyPr/>
+          <a:lstStyle/>
+          <a:p>
+            <a:r>
+              <a:rPr lang="fr-CH" dirty="0"/>
+              <a:t>Host </a:t>
+            </a:r>
+            <a:r>
+              <a:rPr lang="fr-CH" dirty="0" err="1"/>
+              <a:t>Card</a:t>
+            </a:r>
+            <a:r>
+              <a:rPr lang="fr-CH" dirty="0"/>
+              <a:t> Emulation</a:t>
+            </a:r>
+          </a:p>
+        </p:txBody>
+      </p:sp>
+      <p:sp>
+        <p:nvSpPr>
+          <p:cNvPr id="3" name="Espace réservé du contenu 2">
+            <a:extLst>
+              <a:ext uri="{FF2B5EF4-FFF2-40B4-BE49-F238E27FC236}">
+                <a16:creationId xmlns:a16="http://schemas.microsoft.com/office/drawing/2014/main" id="{BA7D04DD-F2AE-BA86-F642-619AE476F97F}"/>
+              </a:ext>
+            </a:extLst>
+          </p:cNvPr>
+          <p:cNvSpPr>
+            <a:spLocks noGrp="1"/>
+          </p:cNvSpPr>
+          <p:nvPr>
+            <p:ph idx="1"/>
+          </p:nvPr>
+        </p:nvSpPr>
+        <p:spPr/>
+        <p:txBody>
+          <a:bodyPr/>
+          <a:lstStyle/>
+          <a:p>
+            <a:r>
+              <a:rPr lang="fr-CH" dirty="0"/>
+              <a:t>Par élément sécurisé</a:t>
+            </a:r>
+          </a:p>
+          <a:p>
+            <a:pPr lvl="1"/>
+            <a:r>
+              <a:rPr lang="fr-CH" dirty="0"/>
+              <a:t>Matériel dédié</a:t>
+            </a:r>
+          </a:p>
+          <a:p>
+            <a:endParaRPr lang="fr-CH" dirty="0"/>
+          </a:p>
+          <a:p>
+            <a:r>
+              <a:rPr lang="fr-CH" dirty="0"/>
+              <a:t>Par software</a:t>
+            </a:r>
+          </a:p>
+          <a:p>
+            <a:pPr lvl="1"/>
+            <a:r>
+              <a:rPr lang="fr-CH" dirty="0"/>
+              <a:t>Android </a:t>
+            </a:r>
+            <a:r>
+              <a:rPr lang="fr-CH" dirty="0" err="1"/>
+              <a:t>Sandbox</a:t>
+            </a:r>
+            <a:endParaRPr lang="fr-CH" dirty="0"/>
+          </a:p>
+          <a:p>
+            <a:pPr lvl="1"/>
+            <a:r>
+              <a:rPr lang="fr-CH" dirty="0"/>
+              <a:t>Peut tourner en background</a:t>
+            </a:r>
+          </a:p>
+        </p:txBody>
+      </p:sp>
+    </p:spTree>
+    <p:extLst>
+      <p:ext uri="{BB962C8B-B14F-4D97-AF65-F5344CB8AC3E}">
+        <p14:creationId xmlns:p14="http://schemas.microsoft.com/office/powerpoint/2010/main" val="2999328705"/>
+      </p:ext>
+    </p:extLst>
+  </p:cSld>
+  <p:clrMapOvr>
+    <a:masterClrMapping/>
+  </p:clrMapOvr>
+</p:sld>
+</file>
+
+<file path=ppt/slides/slide5.xml><?xml version="1.0" encoding="utf-8"?>
+<p:sld xmlns:a="http://schemas.openxmlformats.org/drawingml/2006/main" xmlns:r="http://schemas.openxmlformats.org/officeDocument/2006/relationships" xmlns:p="http://schemas.openxmlformats.org/presentationml/2006/main">
+  <p:cSld>
     <p:bg>
       <p:bgPr>
         <a:solidFill>
@@ -19777,8 +19911,8 @@
         </p:blipFill>
         <p:spPr>
           <a:xfrm>
-            <a:off x="928687" y="0"/>
-            <a:ext cx="10813078" cy="5028081"/>
+            <a:off x="1176220" y="257235"/>
+            <a:ext cx="10197226" cy="4741710"/>
           </a:xfrm>
           <a:prstGeom prst="rect">
             <a:avLst/>
@@ -19789,135 +19923,6 @@
     <p:extLst>
       <p:ext uri="{BB962C8B-B14F-4D97-AF65-F5344CB8AC3E}">
         <p14:creationId xmlns:p14="http://schemas.microsoft.com/office/powerpoint/2010/main" val="3563900663"/>
-      </p:ext>
-    </p:extLst>
-  </p:cSld>
-  <p:clrMapOvr>
-    <a:masterClrMapping/>
-  </p:clrMapOvr>
-</p:sld>
-</file>
-
-<file path=ppt/slides/slide5.xml><?xml version="1.0" encoding="utf-8"?>
-<p:sld xmlns:a="http://schemas.openxmlformats.org/drawingml/2006/main" xmlns:r="http://schemas.openxmlformats.org/officeDocument/2006/relationships" xmlns:p="http://schemas.openxmlformats.org/presentationml/2006/main">
-  <p:cSld>
-    <p:spTree>
-      <p:nvGrpSpPr>
-        <p:cNvPr id="1" name=""/>
-        <p:cNvGrpSpPr/>
-        <p:nvPr/>
-      </p:nvGrpSpPr>
-      <p:grpSpPr>
-        <a:xfrm>
-          <a:off x="0" y="0"/>
-          <a:ext cx="0" cy="0"/>
-          <a:chOff x="0" y="0"/>
-          <a:chExt cx="0" cy="0"/>
-        </a:xfrm>
-      </p:grpSpPr>
-      <p:sp>
-        <p:nvSpPr>
-          <p:cNvPr id="2" name="Titre 1">
-            <a:extLst>
-              <a:ext uri="{FF2B5EF4-FFF2-40B4-BE49-F238E27FC236}">
-                <a16:creationId xmlns:a16="http://schemas.microsoft.com/office/drawing/2014/main" id="{8554291C-E634-B364-A7A2-8423956DEAFF}"/>
-              </a:ext>
-            </a:extLst>
-          </p:cNvPr>
-          <p:cNvSpPr>
-            <a:spLocks noGrp="1"/>
-          </p:cNvSpPr>
-          <p:nvPr>
-            <p:ph type="title"/>
-          </p:nvPr>
-        </p:nvSpPr>
-        <p:spPr/>
-        <p:txBody>
-          <a:bodyPr/>
-          <a:lstStyle/>
-          <a:p>
-            <a:r>
-              <a:rPr lang="fr-CH" dirty="0"/>
-              <a:t>Host </a:t>
-            </a:r>
-            <a:r>
-              <a:rPr lang="fr-CH" dirty="0" err="1"/>
-              <a:t>Card</a:t>
-            </a:r>
-            <a:r>
-              <a:rPr lang="fr-CH" dirty="0"/>
-              <a:t> Emulation</a:t>
-            </a:r>
-          </a:p>
-        </p:txBody>
-      </p:sp>
-      <p:sp>
-        <p:nvSpPr>
-          <p:cNvPr id="3" name="Espace réservé du contenu 2">
-            <a:extLst>
-              <a:ext uri="{FF2B5EF4-FFF2-40B4-BE49-F238E27FC236}">
-                <a16:creationId xmlns:a16="http://schemas.microsoft.com/office/drawing/2014/main" id="{BA7D04DD-F2AE-BA86-F642-619AE476F97F}"/>
-              </a:ext>
-            </a:extLst>
-          </p:cNvPr>
-          <p:cNvSpPr>
-            <a:spLocks noGrp="1"/>
-          </p:cNvSpPr>
-          <p:nvPr>
-            <p:ph idx="1"/>
-          </p:nvPr>
-        </p:nvSpPr>
-        <p:spPr/>
-        <p:txBody>
-          <a:bodyPr/>
-          <a:lstStyle/>
-          <a:p>
-            <a:r>
-              <a:rPr lang="fr-CH" dirty="0"/>
-              <a:t>Par élément sécurisé</a:t>
-            </a:r>
-          </a:p>
-          <a:p>
-            <a:pPr lvl="1"/>
-            <a:r>
-              <a:rPr lang="fr-CH" dirty="0"/>
-              <a:t>Matériel dédié</a:t>
-            </a:r>
-          </a:p>
-          <a:p>
-            <a:endParaRPr lang="fr-CH" dirty="0"/>
-          </a:p>
-          <a:p>
-            <a:r>
-              <a:rPr lang="fr-CH" dirty="0"/>
-              <a:t>Par software</a:t>
-            </a:r>
-          </a:p>
-          <a:p>
-            <a:pPr lvl="1"/>
-            <a:r>
-              <a:rPr lang="fr-CH" dirty="0"/>
-              <a:t>Android </a:t>
-            </a:r>
-            <a:r>
-              <a:rPr lang="fr-CH" dirty="0" err="1"/>
-              <a:t>Sandbox</a:t>
-            </a:r>
-            <a:endParaRPr lang="fr-CH" dirty="0"/>
-          </a:p>
-          <a:p>
-            <a:pPr lvl="1"/>
-            <a:r>
-              <a:rPr lang="fr-CH" dirty="0"/>
-              <a:t>Peut tourner en background</a:t>
-            </a:r>
-          </a:p>
-        </p:txBody>
-      </p:sp>
-    </p:spTree>
-    <p:extLst>
-      <p:ext uri="{BB962C8B-B14F-4D97-AF65-F5344CB8AC3E}">
-        <p14:creationId xmlns:p14="http://schemas.microsoft.com/office/powerpoint/2010/main" val="2999328705"/>
       </p:ext>
     </p:extLst>
   </p:cSld>
